--- a/assets/pptx/catalog-522.pptx
+++ b/assets/pptx/catalog-522.pptx
@@ -3337,7 +3337,7 @@
                 <a:ea typeface="Ebrima"/>
                 <a:cs typeface="Ebrima"/>
               </a:rPr>
-              <a:t>(2x)</a:t>
+              <a:t>2x</a:t>
             </a:r>
           </a:p>
         </p:txBody>
@@ -3538,7 +3538,7 @@
                 <a:ea typeface="Ebrima"/>
                 <a:cs typeface="Ebrima"/>
               </a:rPr>
-              <a:t>(2x)</a:t>
+              <a:t>2x</a:t>
             </a:r>
           </a:p>
         </p:txBody>
@@ -3873,7 +3873,7 @@
                 <a:ea typeface="Ebrima"/>
                 <a:cs typeface="Ebrima"/>
               </a:rPr>
-              <a:t>(2x)</a:t>
+              <a:t>2x</a:t>
             </a:r>
           </a:p>
         </p:txBody>
@@ -4141,7 +4141,7 @@
                 <a:ea typeface="Ebrima"/>
                 <a:cs typeface="Ebrima"/>
               </a:rPr>
-              <a:t>(2x)</a:t>
+              <a:t>2x</a:t>
             </a:r>
           </a:p>
         </p:txBody>
@@ -4342,7 +4342,7 @@
                 <a:ea typeface="Ebrima"/>
                 <a:cs typeface="Ebrima"/>
               </a:rPr>
-              <a:t>(2x)</a:t>
+              <a:t>2x</a:t>
             </a:r>
           </a:p>
         </p:txBody>
@@ -4543,7 +4543,7 @@
                 <a:ea typeface="Ebrima"/>
                 <a:cs typeface="Ebrima"/>
               </a:rPr>
-              <a:t>(2x)</a:t>
+              <a:t>2x</a:t>
             </a:r>
           </a:p>
         </p:txBody>
@@ -4811,7 +4811,7 @@
                 <a:ea typeface="Ebrima"/>
                 <a:cs typeface="Ebrima"/>
               </a:rPr>
-              <a:t>(2x)</a:t>
+              <a:t>2x</a:t>
             </a:r>
           </a:p>
         </p:txBody>
@@ -5213,7 +5213,7 @@
                 <a:ea typeface="Ebrima"/>
                 <a:cs typeface="Ebrima"/>
               </a:rPr>
-              <a:t>(2x)</a:t>
+              <a:t>2x</a:t>
             </a:r>
           </a:p>
         </p:txBody>
@@ -5414,7 +5414,7 @@
                 <a:ea typeface="Ebrima"/>
                 <a:cs typeface="Ebrima"/>
               </a:rPr>
-              <a:t>(2x)</a:t>
+              <a:t>2x</a:t>
             </a:r>
           </a:p>
         </p:txBody>
@@ -5481,7 +5481,7 @@
                 <a:ea typeface="Ebrima"/>
                 <a:cs typeface="Ebrima"/>
               </a:rPr>
-              <a:t>(2x)</a:t>
+              <a:t>2x</a:t>
             </a:r>
           </a:p>
         </p:txBody>
@@ -5682,7 +5682,7 @@
                 <a:ea typeface="Ebrima"/>
                 <a:cs typeface="Ebrima"/>
               </a:rPr>
-              <a:t>(2x)</a:t>
+              <a:t>2x</a:t>
             </a:r>
           </a:p>
         </p:txBody>
@@ -5883,7 +5883,7 @@
                 <a:ea typeface="Ebrima"/>
                 <a:cs typeface="Ebrima"/>
               </a:rPr>
-              <a:t>(2x)</a:t>
+              <a:t>2x</a:t>
             </a:r>
           </a:p>
         </p:txBody>
@@ -6084,7 +6084,7 @@
                 <a:ea typeface="Ebrima"/>
                 <a:cs typeface="Ebrima"/>
               </a:rPr>
-              <a:t>(2x)</a:t>
+              <a:t>2x</a:t>
             </a:r>
           </a:p>
         </p:txBody>
@@ -6352,7 +6352,7 @@
                 <a:ea typeface="Ebrima"/>
                 <a:cs typeface="Ebrima"/>
               </a:rPr>
-              <a:t>ሌላ ሌላ ነገር አልፈልግም ብላ (2x)</a:t>
+              <a:t>ሌላ ሌላ ነገር አልፈልግም ብላ 2x</a:t>
             </a:r>
           </a:p>
         </p:txBody>
@@ -6486,7 +6486,7 @@
                 <a:ea typeface="Ebrima"/>
                 <a:cs typeface="Ebrima"/>
               </a:rPr>
-              <a:t>አልፈልግም ብላ (2x)</a:t>
+              <a:t>አልፈልግም ብላ 2x</a:t>
             </a:r>
           </a:p>
         </p:txBody>
@@ -6687,7 +6687,7 @@
                 <a:ea typeface="Ebrima"/>
                 <a:cs typeface="Ebrima"/>
               </a:rPr>
-              <a:t>(2x)</a:t>
+              <a:t>2x</a:t>
             </a:r>
           </a:p>
         </p:txBody>
@@ -6888,7 +6888,7 @@
                 <a:ea typeface="Ebrima"/>
                 <a:cs typeface="Ebrima"/>
               </a:rPr>
-              <a:t>(2x)</a:t>
+              <a:t>2x</a:t>
             </a:r>
           </a:p>
         </p:txBody>
@@ -7156,7 +7156,7 @@
                 <a:ea typeface="Ebrima"/>
                 <a:cs typeface="Ebrima"/>
               </a:rPr>
-              <a:t>(2x)</a:t>
+              <a:t>2x</a:t>
             </a:r>
           </a:p>
         </p:txBody>
@@ -7357,7 +7357,7 @@
                 <a:ea typeface="Ebrima"/>
                 <a:cs typeface="Ebrima"/>
               </a:rPr>
-              <a:t>(2x)</a:t>
+              <a:t>2x</a:t>
             </a:r>
           </a:p>
         </p:txBody>
@@ -7692,7 +7692,7 @@
                 <a:ea typeface="Ebrima"/>
                 <a:cs typeface="Ebrima"/>
               </a:rPr>
-              <a:t>(2x)</a:t>
+              <a:t>2x</a:t>
             </a:r>
           </a:p>
         </p:txBody>
@@ -8362,7 +8362,7 @@
                 <a:ea typeface="Ebrima"/>
                 <a:cs typeface="Ebrima"/>
               </a:rPr>
-              <a:t>የፊትህን ብርሃን ማን አይቶ ይቆማል (2x)</a:t>
+              <a:t>የፊትህን ብርሃን ማን አይቶ ይቆማል 2x</a:t>
             </a:r>
           </a:p>
         </p:txBody>
@@ -8697,7 +8697,7 @@
                 <a:ea typeface="Ebrima"/>
                 <a:cs typeface="Ebrima"/>
               </a:rPr>
-              <a:t>(2x)</a:t>
+              <a:t>2x</a:t>
             </a:r>
           </a:p>
         </p:txBody>
@@ -8898,7 +8898,7 @@
                 <a:ea typeface="Ebrima"/>
                 <a:cs typeface="Ebrima"/>
               </a:rPr>
-              <a:t>(2x)</a:t>
+              <a:t>2x</a:t>
             </a:r>
           </a:p>
         </p:txBody>
@@ -9099,7 +9099,7 @@
                 <a:ea typeface="Ebrima"/>
                 <a:cs typeface="Ebrima"/>
               </a:rPr>
-              <a:t>(2x)</a:t>
+              <a:t>2x</a:t>
             </a:r>
           </a:p>
         </p:txBody>
@@ -9300,7 +9300,7 @@
                 <a:ea typeface="Ebrima"/>
                 <a:cs typeface="Ebrima"/>
               </a:rPr>
-              <a:t>ሊያይህ ተመኘ, (2x), ነበልባል ዓይኖችህን, ያመረውን ፊትህን, የነጠረው እግርህን</a:t>
+              <a:t>ሊያይህ ተመኘ, 2x, ነበልባል ዓይኖችህን, ያመረውን ፊትህን, የነጠረው እግርህን</a:t>
             </a:r>
           </a:p>
         </p:txBody>
@@ -9367,7 +9367,7 @@
                 <a:ea typeface="Ebrima"/>
                 <a:cs typeface="Ebrima"/>
               </a:rPr>
-              <a:t>እናውራው ውበትህን (2x)</a:t>
+              <a:t>እናውራው ውበትህን 2x</a:t>
             </a:r>
           </a:p>
         </p:txBody>
@@ -9568,7 +9568,7 @@
                 <a:ea typeface="Ebrima"/>
                 <a:cs typeface="Ebrima"/>
               </a:rPr>
-              <a:t>(2x)</a:t>
+              <a:t>2x</a:t>
             </a:r>
           </a:p>
         </p:txBody>
@@ -9769,7 +9769,7 @@
                 <a:ea typeface="Ebrima"/>
                 <a:cs typeface="Ebrima"/>
               </a:rPr>
-              <a:t>(2x)</a:t>
+              <a:t>2x</a:t>
             </a:r>
           </a:p>
         </p:txBody>
